--- a/exports/pptx/lessons/primary-module-05-dot-addition/day-03-find-the-pair.pptx
+++ b/exports/pptx/lessons/primary-module-05-dot-addition/day-03-find-the-pair.pptx
@@ -16,9 +16,10 @@
     <p:sldId id="264" r:id="rId10"/>
     <p:sldId id="265" r:id="rId11"/>
     <p:sldId id="266" r:id="rId12"/>
+    <p:sldId id="267" r:id="rId13"/>
   </p:sldIdLst>
   <p:notesMasterIdLst>
-    <p:notesMasterId r:id="rId13"/>
+    <p:notesMasterId r:id="rId14"/>
   </p:notesMasterIdLst>
   <p:sldSz cx="9144000" cy="5143500"/>
   <p:notesSz cx="5143500" cy="9144000"/>
@@ -712,6 +713,94 @@
             <a:fld id="{F7021451-1387-4CA6-816F-3879F97B5CBC}" type="slidenum">
               <a:rPr lang="en-US"/>
               <a:t>11</a:t>
+            </a:fld>
+            <a:endParaRPr lang="en-US"/>
+          </a:p>
+        </p:txBody>
+      </p:sp>
+    </p:spTree>
+    <p:extLst>
+      <p:ext uri="{BB962C8B-B14F-4D97-AF65-F5344CB8AC3E}">
+        <p14:creationId xmlns:p14="http://schemas.microsoft.com/office/powerpoint/2010/main" val="1024086991"/>
+      </p:ext>
+    </p:extLst>
+  </p:cSld>
+  <p:clrMapOvr>
+    <a:masterClrMapping/>
+  </p:clrMapOvr>
+</p:notes>
+</file>
+
+<file path=ppt/notesSlides/notesSlide12.xml><?xml version="1.0" encoding="utf-8"?>
+<p:notes xmlns:a="http://schemas.openxmlformats.org/drawingml/2006/main" xmlns:r="http://schemas.openxmlformats.org/officeDocument/2006/relationships" xmlns:p="http://schemas.openxmlformats.org/presentationml/2006/main">
+  <p:cSld>
+    <p:spTree>
+      <p:nvGrpSpPr>
+        <p:cNvPr id="1" name=""/>
+        <p:cNvGrpSpPr/>
+        <p:nvPr/>
+      </p:nvGrpSpPr>
+      <p:grpSpPr>
+        <a:xfrm>
+          <a:off x="0" y="0"/>
+          <a:ext cx="0" cy="0"/>
+          <a:chOff x="0" y="0"/>
+          <a:chExt cx="0" cy="0"/>
+        </a:xfrm>
+      </p:grpSpPr>
+      <p:sp>
+        <p:nvSpPr>
+          <p:cNvPr id="2" name="Slide Image Placeholder 1"/>
+          <p:cNvSpPr>
+            <a:spLocks noGrp="1" noRot="1" noChangeAspect="1"/>
+          </p:cNvSpPr>
+          <p:nvPr>
+            <p:ph type="sldImg"/>
+          </p:nvPr>
+        </p:nvSpPr>
+        <p:spPr/>
+      </p:sp>
+      <p:sp>
+        <p:nvSpPr>
+          <p:cNvPr id="3" name="Notes Placeholder 2"/>
+          <p:cNvSpPr>
+            <a:spLocks noGrp="1"/>
+          </p:cNvSpPr>
+          <p:nvPr>
+            <p:ph type="body" idx="1"/>
+          </p:nvPr>
+        </p:nvSpPr>
+        <p:spPr/>
+        <p:txBody>
+          <a:bodyPr/>
+          <a:lstStyle/>
+          <a:p>
+            <a:r>
+              <a:rPr lang="en-US" dirty="0"/>
+              <a:t/>
+            </a:r>
+            <a:endParaRPr lang="en-US" dirty="0"/>
+          </a:p>
+        </p:txBody>
+      </p:sp>
+      <p:sp>
+        <p:nvSpPr>
+          <p:cNvPr id="4" name="Slide Number Placeholder 3"/>
+          <p:cNvSpPr>
+            <a:spLocks noGrp="1"/>
+          </p:cNvSpPr>
+          <p:nvPr>
+            <p:ph type="sldNum" sz="quarter" idx="10"/>
+          </p:nvPr>
+        </p:nvSpPr>
+        <p:spPr/>
+        <p:txBody>
+          <a:bodyPr/>
+          <a:lstStyle/>
+          <a:p>
+            <a:fld id="{F7021451-1387-4CA6-816F-3879F97B5CBC}" type="slidenum">
+              <a:rPr lang="en-US"/>
+              <a:t>12</a:t>
             </a:fld>
             <a:endParaRPr lang="en-US"/>
           </a:p>
@@ -1965,102 +2054,6 @@
         </p:nvSpPr>
         <p:spPr>
           <a:xfrm>
-            <a:off x="406301" y="1223963"/>
-            <a:ext cx="8498026" cy="274290"/>
-          </a:xfrm>
-          <a:prstGeom prst="rect">
-            <a:avLst/>
-          </a:prstGeom>
-          <a:noFill/>
-          <a:ln/>
-        </p:spPr>
-        <p:txBody>
-          <a:bodyPr wrap="square" lIns="0" tIns="0" rIns="0" bIns="0" rtlCol="0" anchor="t"/>
-          <a:lstStyle/>
-          <a:p>
-            <a:pPr algn="l" indent="0" marL="0">
-              <a:lnSpc>
-                <a:spcPts val="2160"/>
-              </a:lnSpc>
-              <a:spcBef>
-                <a:spcPts val="600"/>
-              </a:spcBef>
-              <a:spcAft>
-                <a:spcPts val="800"/>
-              </a:spcAft>
-              <a:buNone/>
-            </a:pPr>
-            <a:r>
-              <a:rPr lang="en-US" sz="1800" b="1" dirty="0">
-                <a:solidFill>
-                  <a:srgbClr val="E07A5F"/>
-                </a:solidFill>
-                <a:latin typeface="Georgia" pitchFamily="34" charset="0"/>
-                <a:ea typeface="Georgia" pitchFamily="34" charset="-122"/>
-                <a:cs typeface="Georgia" pitchFamily="34" charset="-120"/>
-              </a:rPr>
-              <a:t>Goal</a:t>
-            </a:r>
-            <a:endParaRPr lang="en-US" sz="1800" dirty="0"/>
-          </a:p>
-        </p:txBody>
-      </p:sp>
-      <p:sp>
-        <p:nvSpPr>
-          <p:cNvPr id="6" name="Text 4"/>
-          <p:cNvSpPr/>
-          <p:nvPr/>
-        </p:nvSpPr>
-        <p:spPr>
-          <a:xfrm>
-            <a:off x="406301" y="1637854"/>
-            <a:ext cx="8498026" cy="213271"/>
-          </a:xfrm>
-          <a:prstGeom prst="rect">
-            <a:avLst/>
-          </a:prstGeom>
-          <a:noFill/>
-          <a:ln/>
-        </p:spPr>
-        <p:txBody>
-          <a:bodyPr wrap="square" lIns="0" tIns="0" rIns="0" bIns="0" rtlCol="0" anchor="t"/>
-          <a:lstStyle/>
-          <a:p>
-            <a:pPr algn="l" indent="0" marL="0">
-              <a:lnSpc>
-                <a:spcPts val="1680"/>
-              </a:lnSpc>
-              <a:spcBef>
-                <a:spcPts val="300"/>
-              </a:spcBef>
-              <a:spcAft>
-                <a:spcPts val="300"/>
-              </a:spcAft>
-              <a:buNone/>
-            </a:pPr>
-            <a:r>
-              <a:rPr lang="en-US" sz="1200" dirty="0">
-                <a:solidFill>
-                  <a:srgbClr val="2C2C2C"/>
-                </a:solidFill>
-                <a:latin typeface="Verdana" pitchFamily="34" charset="0"/>
-                <a:ea typeface="Verdana" pitchFamily="34" charset="-122"/>
-                <a:cs typeface="Verdana" pitchFamily="34" charset="-120"/>
-              </a:rPr>
-              <a:t>Children spot 10-pairs in a list of 6–8 single-digit numbers within 10 seconds.</a:t>
-            </a:r>
-            <a:endParaRPr lang="en-US" sz="1200" dirty="0"/>
-          </a:p>
-        </p:txBody>
-      </p:sp>
-      <p:sp>
-        <p:nvSpPr>
-          <p:cNvPr id="7" name="Text 5"/>
-          <p:cNvSpPr/>
-          <p:nvPr/>
-        </p:nvSpPr>
-        <p:spPr>
-          <a:xfrm>
             <a:off x="406301" y="4434929"/>
             <a:ext cx="8498026" cy="213271"/>
           </a:xfrm>
@@ -2205,7 +2198,7 @@
                 <a:ea typeface="Georgia" pitchFamily="34" charset="-122"/>
                 <a:cs typeface="Georgia" pitchFamily="34" charset="-120"/>
               </a:rPr>
-              <a:t>Differentiation</a:t>
+              <a:t>Homework</a:t>
             </a:r>
             <a:endParaRPr lang="en-US" sz="1800" dirty="0"/>
           </a:p>
@@ -2220,7 +2213,7 @@
         <p:spPr>
           <a:xfrm>
             <a:off x="634901" y="883593"/>
-            <a:ext cx="8102798" cy="525661"/>
+            <a:ext cx="8102798" cy="281880"/>
           </a:xfrm>
           <a:prstGeom prst="rect">
             <a:avLst/>
@@ -2243,7 +2236,7 @@
               <a:buChar char="•"/>
             </a:pPr>
             <a:r>
-              <a:rPr lang="en-US" sz="1200" b="1" dirty="0">
+              <a:rPr lang="en-US" sz="1200" dirty="0">
                 <a:solidFill>
                   <a:srgbClr val="2C2C2C"/>
                 </a:solidFill>
@@ -2251,71 +2244,7 @@
                 <a:ea typeface="Verdana" pitchFamily="34" charset="-122"/>
                 <a:cs typeface="Verdana" pitchFamily="34" charset="-120"/>
               </a:rPr>
-              <a:t>Tier up:</a:t>
-            </a:r>
-            <a:pPr algn="l" indent="0" marL="0">
-              <a:lnSpc>
-                <a:spcPts val="1620"/>
-              </a:lnSpc>
-              <a:spcAft>
-                <a:spcPts val="300"/>
-              </a:spcAft>
-              <a:buNone/>
-            </a:pPr>
-            <a:r>
-              <a:rPr lang="en-US" sz="1200" dirty="0">
-                <a:solidFill>
-                  <a:srgbClr val="2C2C2C"/>
-                </a:solidFill>
-                <a:latin typeface="Verdana" pitchFamily="34" charset="0"/>
-                <a:ea typeface="Verdana" pitchFamily="34" charset="-122"/>
-                <a:cs typeface="Verdana" pitchFamily="34" charset="-120"/>
-              </a:rPr>
-              <a:t> Find pairs that make 10 AND pairs that make 11.</a:t>
-            </a:r>
-            <a:endParaRPr lang="en-US" sz="1200" dirty="0"/>
-          </a:p>
-          <a:p>
-            <a:pPr algn="l" marL="342900" indent="-342900">
-              <a:lnSpc>
-                <a:spcPts val="1620"/>
-              </a:lnSpc>
-              <a:spcAft>
-                <a:spcPts val="300"/>
-              </a:spcAft>
-              <a:buSzPct val="100000"/>
-              <a:buChar char="•"/>
-            </a:pPr>
-            <a:r>
-              <a:rPr lang="en-US" sz="1200" b="1" dirty="0">
-                <a:solidFill>
-                  <a:srgbClr val="2C2C2C"/>
-                </a:solidFill>
-                <a:latin typeface="Verdana" pitchFamily="34" charset="0"/>
-                <a:ea typeface="Verdana" pitchFamily="34" charset="-122"/>
-                <a:cs typeface="Verdana" pitchFamily="34" charset="-120"/>
-              </a:rPr>
-              <a:t>Tier down:</a:t>
-            </a:r>
-            <a:pPr algn="l" indent="0" marL="0">
-              <a:lnSpc>
-                <a:spcPts val="1620"/>
-              </a:lnSpc>
-              <a:spcAft>
-                <a:spcPts val="300"/>
-              </a:spcAft>
-              <a:buNone/>
-            </a:pPr>
-            <a:r>
-              <a:rPr lang="en-US" sz="1200" dirty="0">
-                <a:solidFill>
-                  <a:srgbClr val="2C2C2C"/>
-                </a:solidFill>
-                <a:latin typeface="Verdana" pitchFamily="34" charset="0"/>
-                <a:ea typeface="Verdana" pitchFamily="34" charset="-122"/>
-                <a:cs typeface="Verdana" pitchFamily="34" charset="-120"/>
-              </a:rPr>
-              <a:t> Work with shorter rows (4 digits each).</a:t>
+              <a:t>5 more scanning rows on the back of the worksheet.</a:t>
             </a:r>
             <a:endParaRPr lang="en-US" sz="1200" dirty="0"/>
           </a:p>
@@ -2473,7 +2402,7 @@
                 <a:ea typeface="Georgia" pitchFamily="34" charset="-122"/>
                 <a:cs typeface="Georgia" pitchFamily="34" charset="-120"/>
               </a:rPr>
-              <a:t>Teacher's quick notes</a:t>
+              <a:t>Differentiation</a:t>
             </a:r>
             <a:endParaRPr lang="en-US" sz="1800" dirty="0"/>
           </a:p>
@@ -2487,8 +2416,8 @@
         </p:nvSpPr>
         <p:spPr>
           <a:xfrm>
-            <a:off x="406301" y="870942"/>
-            <a:ext cx="8498026" cy="426541"/>
+            <a:off x="634901" y="883593"/>
+            <a:ext cx="8102798" cy="525661"/>
           </a:xfrm>
           <a:prstGeom prst="rect">
             <a:avLst/>
@@ -2500,20 +2429,18 @@
           <a:bodyPr wrap="square" lIns="0" tIns="0" rIns="0" bIns="0" rtlCol="0" anchor="t"/>
           <a:lstStyle/>
           <a:p>
-            <a:pPr algn="l" indent="0" marL="0">
-              <a:lnSpc>
-                <a:spcPts val="1680"/>
-              </a:lnSpc>
-              <a:spcBef>
-                <a:spcPts val="300"/>
-              </a:spcBef>
+            <a:pPr algn="l" marL="342900" indent="-342900">
+              <a:lnSpc>
+                <a:spcPts val="1620"/>
+              </a:lnSpc>
               <a:spcAft>
                 <a:spcPts val="300"/>
               </a:spcAft>
-              <a:buNone/>
-            </a:pPr>
-            <a:r>
-              <a:rPr lang="en-US" sz="1200" dirty="0">
+              <a:buSzPct val="100000"/>
+              <a:buChar char="•"/>
+            </a:pPr>
+            <a:r>
+              <a:rPr lang="en-US" sz="1200" b="1" dirty="0">
                 <a:solidFill>
                   <a:srgbClr val="2C2C2C"/>
                 </a:solidFill>
@@ -2521,7 +2448,299 @@
                 <a:ea typeface="Verdana" pitchFamily="34" charset="-122"/>
                 <a:cs typeface="Verdana" pitchFamily="34" charset="-120"/>
               </a:rPr>
-              <a:t>– The pattern of "scan and group" is the key skill — more important than getting every pair right. – If a child circles 5+5 as one pair, that's correct (both 5s used together).</a:t>
+              <a:t>Tier up:</a:t>
+            </a:r>
+            <a:pPr algn="l" indent="0" marL="0">
+              <a:lnSpc>
+                <a:spcPts val="1620"/>
+              </a:lnSpc>
+              <a:spcAft>
+                <a:spcPts val="300"/>
+              </a:spcAft>
+              <a:buNone/>
+            </a:pPr>
+            <a:r>
+              <a:rPr lang="en-US" sz="1200" dirty="0">
+                <a:solidFill>
+                  <a:srgbClr val="2C2C2C"/>
+                </a:solidFill>
+                <a:latin typeface="Verdana" pitchFamily="34" charset="0"/>
+                <a:ea typeface="Verdana" pitchFamily="34" charset="-122"/>
+                <a:cs typeface="Verdana" pitchFamily="34" charset="-120"/>
+              </a:rPr>
+              <a:t> Find pairs that make 10 AND pairs that make 11.</a:t>
+            </a:r>
+            <a:endParaRPr lang="en-US" sz="1200" dirty="0"/>
+          </a:p>
+          <a:p>
+            <a:pPr algn="l" marL="342900" indent="-342900">
+              <a:lnSpc>
+                <a:spcPts val="1620"/>
+              </a:lnSpc>
+              <a:spcAft>
+                <a:spcPts val="300"/>
+              </a:spcAft>
+              <a:buSzPct val="100000"/>
+              <a:buChar char="•"/>
+            </a:pPr>
+            <a:r>
+              <a:rPr lang="en-US" sz="1200" b="1" dirty="0">
+                <a:solidFill>
+                  <a:srgbClr val="2C2C2C"/>
+                </a:solidFill>
+                <a:latin typeface="Verdana" pitchFamily="34" charset="0"/>
+                <a:ea typeface="Verdana" pitchFamily="34" charset="-122"/>
+                <a:cs typeface="Verdana" pitchFamily="34" charset="-120"/>
+              </a:rPr>
+              <a:t>Tier down:</a:t>
+            </a:r>
+            <a:pPr algn="l" indent="0" marL="0">
+              <a:lnSpc>
+                <a:spcPts val="1620"/>
+              </a:lnSpc>
+              <a:spcAft>
+                <a:spcPts val="300"/>
+              </a:spcAft>
+              <a:buNone/>
+            </a:pPr>
+            <a:r>
+              <a:rPr lang="en-US" sz="1200" dirty="0">
+                <a:solidFill>
+                  <a:srgbClr val="2C2C2C"/>
+                </a:solidFill>
+                <a:latin typeface="Verdana" pitchFamily="34" charset="0"/>
+                <a:ea typeface="Verdana" pitchFamily="34" charset="-122"/>
+                <a:cs typeface="Verdana" pitchFamily="34" charset="-120"/>
+              </a:rPr>
+              <a:t> Work with shorter rows (4 digits each).</a:t>
+            </a:r>
+            <a:endParaRPr lang="en-US" sz="1200" dirty="0"/>
+          </a:p>
+        </p:txBody>
+      </p:sp>
+      <p:sp>
+        <p:nvSpPr>
+          <p:cNvPr id="5" name="Text 3"/>
+          <p:cNvSpPr/>
+          <p:nvPr/>
+        </p:nvSpPr>
+        <p:spPr>
+          <a:xfrm>
+            <a:off x="406301" y="4434929"/>
+            <a:ext cx="8498026" cy="213271"/>
+          </a:xfrm>
+          <a:prstGeom prst="rect">
+            <a:avLst/>
+          </a:prstGeom>
+          <a:noFill/>
+          <a:ln/>
+        </p:spPr>
+        <p:txBody>
+          <a:bodyPr wrap="square" lIns="0" tIns="0" rIns="0" bIns="0" rtlCol="0" anchor="t"/>
+          <a:lstStyle/>
+          <a:p>
+            <a:pPr algn="l" indent="0" marL="0">
+              <a:lnSpc>
+                <a:spcPts val="1680"/>
+              </a:lnSpc>
+              <a:spcBef>
+                <a:spcPts val="300"/>
+              </a:spcBef>
+              <a:spcAft>
+                <a:spcPts val="300"/>
+              </a:spcAft>
+              <a:buNone/>
+            </a:pPr>
+            <a:r>
+              <a:rPr lang="en-US" sz="1200" dirty="0">
+                <a:solidFill>
+                  <a:srgbClr val="2C2C2C"/>
+                </a:solidFill>
+                <a:latin typeface="Verdana" pitchFamily="34" charset="0"/>
+                <a:ea typeface="Verdana" pitchFamily="34" charset="-122"/>
+                <a:cs typeface="Verdana" pitchFamily="34" charset="-120"/>
+              </a:rPr>
+              <a:t>Primary ·  · IKS Curriculum</a:t>
+            </a:r>
+            <a:endParaRPr lang="en-US" sz="1200" dirty="0"/>
+          </a:p>
+        </p:txBody>
+      </p:sp>
+    </p:spTree>
+  </p:cSld>
+  <p:clrMapOvr>
+    <a:masterClrMapping/>
+  </p:clrMapOvr>
+</p:sld>
+</file>
+
+<file path=ppt/slides/slide12.xml><?xml version="1.0" encoding="utf-8"?>
+<p:sld xmlns:a="http://schemas.openxmlformats.org/drawingml/2006/main" xmlns:r="http://schemas.openxmlformats.org/officeDocument/2006/relationships" xmlns:p="http://schemas.openxmlformats.org/presentationml/2006/main">
+  <p:cSld name="Slide 12">
+    <p:bg>
+      <p:bgPr>
+        <a:solidFill>
+          <a:srgbClr val="FAF7F2"/>
+        </a:solidFill>
+      </p:bgPr>
+    </p:bg>
+    <p:spTree>
+      <p:nvGrpSpPr>
+        <p:cNvPr id="1" name=""/>
+        <p:cNvGrpSpPr/>
+        <p:nvPr/>
+      </p:nvGrpSpPr>
+      <p:grpSpPr>
+        <a:xfrm>
+          <a:off x="0" y="0"/>
+          <a:ext cx="0" cy="0"/>
+          <a:chOff x="0" y="0"/>
+          <a:chExt cx="0" cy="0"/>
+        </a:xfrm>
+      </p:grpSpPr>
+      <p:sp>
+        <p:nvSpPr>
+          <p:cNvPr id="2" name="Text 0"/>
+          <p:cNvSpPr/>
+          <p:nvPr/>
+        </p:nvSpPr>
+        <p:spPr>
+          <a:xfrm>
+            <a:off x="0" y="0"/>
+            <a:ext cx="9144000" cy="101501"/>
+          </a:xfrm>
+          <a:prstGeom prst="rect">
+            <a:avLst/>
+          </a:prstGeom>
+          <a:solidFill>
+            <a:srgbClr val="87A96B"/>
+          </a:solidFill>
+          <a:ln/>
+        </p:spPr>
+        <p:txBody>
+          <a:bodyPr wrap="square" rtlCol="0" anchor="ctr"/>
+          <a:lstStyle/>
+          <a:p>
+            <a:pPr indent="0" marL="0">
+              <a:buNone/>
+            </a:pPr>
+            <a:endParaRPr lang="en-US" dirty="0"/>
+          </a:p>
+        </p:txBody>
+      </p:sp>
+      <p:sp>
+        <p:nvSpPr>
+          <p:cNvPr id="3" name="Text 1"/>
+          <p:cNvSpPr/>
+          <p:nvPr/>
+        </p:nvSpPr>
+        <p:spPr>
+          <a:xfrm>
+            <a:off x="406301" y="457051"/>
+            <a:ext cx="8498026" cy="274290"/>
+          </a:xfrm>
+          <a:prstGeom prst="rect">
+            <a:avLst/>
+          </a:prstGeom>
+          <a:noFill/>
+          <a:ln/>
+        </p:spPr>
+        <p:txBody>
+          <a:bodyPr wrap="square" lIns="0" tIns="0" rIns="0" bIns="0" rtlCol="0" anchor="t"/>
+          <a:lstStyle/>
+          <a:p>
+            <a:pPr algn="l" indent="0" marL="0">
+              <a:lnSpc>
+                <a:spcPts val="2160"/>
+              </a:lnSpc>
+              <a:spcBef>
+                <a:spcPts val="600"/>
+              </a:spcBef>
+              <a:spcAft>
+                <a:spcPts val="800"/>
+              </a:spcAft>
+              <a:buNone/>
+            </a:pPr>
+            <a:r>
+              <a:rPr lang="en-US" sz="1800" b="1" dirty="0">
+                <a:solidFill>
+                  <a:srgbClr val="E07A5F"/>
+                </a:solidFill>
+                <a:latin typeface="Georgia" pitchFamily="34" charset="0"/>
+                <a:ea typeface="Georgia" pitchFamily="34" charset="-122"/>
+                <a:cs typeface="Georgia" pitchFamily="34" charset="-120"/>
+              </a:rPr>
+              <a:t>Teacher's quick notes</a:t>
+            </a:r>
+            <a:endParaRPr lang="en-US" sz="1800" dirty="0"/>
+          </a:p>
+        </p:txBody>
+      </p:sp>
+      <p:sp>
+        <p:nvSpPr>
+          <p:cNvPr id="4" name="Text 2"/>
+          <p:cNvSpPr/>
+          <p:nvPr/>
+        </p:nvSpPr>
+        <p:spPr>
+          <a:xfrm>
+            <a:off x="634901" y="883593"/>
+            <a:ext cx="8102798" cy="525661"/>
+          </a:xfrm>
+          <a:prstGeom prst="rect">
+            <a:avLst/>
+          </a:prstGeom>
+          <a:noFill/>
+          <a:ln/>
+        </p:spPr>
+        <p:txBody>
+          <a:bodyPr wrap="square" lIns="0" tIns="0" rIns="0" bIns="0" rtlCol="0" anchor="t"/>
+          <a:lstStyle/>
+          <a:p>
+            <a:pPr algn="l" marL="342900" indent="-342900">
+              <a:lnSpc>
+                <a:spcPts val="1620"/>
+              </a:lnSpc>
+              <a:spcAft>
+                <a:spcPts val="300"/>
+              </a:spcAft>
+              <a:buSzPct val="100000"/>
+              <a:buChar char="•"/>
+            </a:pPr>
+            <a:r>
+              <a:rPr lang="en-US" sz="1200" dirty="0">
+                <a:solidFill>
+                  <a:srgbClr val="2C2C2C"/>
+                </a:solidFill>
+                <a:latin typeface="Verdana" pitchFamily="34" charset="0"/>
+                <a:ea typeface="Verdana" pitchFamily="34" charset="-122"/>
+                <a:cs typeface="Verdana" pitchFamily="34" charset="-120"/>
+              </a:rPr>
+              <a:t>The pattern of "scan and group" is the key skill — more important than getting every pair right.</a:t>
+            </a:r>
+            <a:endParaRPr lang="en-US" sz="1200" dirty="0"/>
+          </a:p>
+          <a:p>
+            <a:pPr algn="l" marL="342900" indent="-342900">
+              <a:lnSpc>
+                <a:spcPts val="1620"/>
+              </a:lnSpc>
+              <a:spcAft>
+                <a:spcPts val="300"/>
+              </a:spcAft>
+              <a:buSzPct val="100000"/>
+              <a:buChar char="•"/>
+            </a:pPr>
+            <a:r>
+              <a:rPr lang="en-US" sz="1200" dirty="0">
+                <a:solidFill>
+                  <a:srgbClr val="2C2C2C"/>
+                </a:solidFill>
+                <a:latin typeface="Verdana" pitchFamily="34" charset="0"/>
+                <a:ea typeface="Verdana" pitchFamily="34" charset="-122"/>
+                <a:cs typeface="Verdana" pitchFamily="34" charset="-120"/>
+              </a:rPr>
+              <a:t>If a child circles 5+5 as one pair, that's correct (both 5s used together).</a:t>
             </a:r>
             <a:endParaRPr lang="en-US" sz="1200" dirty="0"/>
           </a:p>
@@ -2679,7 +2898,7 @@
                 <a:ea typeface="Georgia" pitchFamily="34" charset="-122"/>
                 <a:cs typeface="Georgia" pitchFamily="34" charset="-120"/>
               </a:rPr>
-              <a:t>Materials</a:t>
+              <a:t>Goal</a:t>
             </a:r>
             <a:endParaRPr lang="en-US" sz="1800" dirty="0"/>
           </a:p>
@@ -2727,7 +2946,7 @@
                 <a:ea typeface="Verdana" pitchFamily="34" charset="-122"/>
                 <a:cs typeface="Verdana" pitchFamily="34" charset="-120"/>
               </a:rPr>
-              <a:t>– Worksheet with 10 rows, each a list of 6–8 digits (printable) – Pencils</a:t>
+              <a:t>Children spot 10-pairs in a list of 6–8 single-digit numbers within 10 seconds.</a:t>
             </a:r>
             <a:endParaRPr lang="en-US" sz="1200" dirty="0"/>
           </a:p>
@@ -2885,7 +3104,7 @@
                 <a:ea typeface="Georgia" pitchFamily="34" charset="-122"/>
                 <a:cs typeface="Georgia" pitchFamily="34" charset="-120"/>
               </a:rPr>
-              <a:t>The flow</a:t>
+              <a:t>Materials</a:t>
             </a:r>
             <a:endParaRPr lang="en-US" sz="1800" dirty="0"/>
           </a:p>
@@ -2894,6 +3113,76 @@
       <p:sp>
         <p:nvSpPr>
           <p:cNvPr id="4" name="Text 2"/>
+          <p:cNvSpPr/>
+          <p:nvPr/>
+        </p:nvSpPr>
+        <p:spPr>
+          <a:xfrm>
+            <a:off x="634901" y="883593"/>
+            <a:ext cx="8102798" cy="525661"/>
+          </a:xfrm>
+          <a:prstGeom prst="rect">
+            <a:avLst/>
+          </a:prstGeom>
+          <a:noFill/>
+          <a:ln/>
+        </p:spPr>
+        <p:txBody>
+          <a:bodyPr wrap="square" lIns="0" tIns="0" rIns="0" bIns="0" rtlCol="0" anchor="t"/>
+          <a:lstStyle/>
+          <a:p>
+            <a:pPr algn="l" marL="342900" indent="-342900">
+              <a:lnSpc>
+                <a:spcPts val="1620"/>
+              </a:lnSpc>
+              <a:spcAft>
+                <a:spcPts val="300"/>
+              </a:spcAft>
+              <a:buSzPct val="100000"/>
+              <a:buChar char="•"/>
+            </a:pPr>
+            <a:r>
+              <a:rPr lang="en-US" sz="1200" dirty="0">
+                <a:solidFill>
+                  <a:srgbClr val="2C2C2C"/>
+                </a:solidFill>
+                <a:latin typeface="Verdana" pitchFamily="34" charset="0"/>
+                <a:ea typeface="Verdana" pitchFamily="34" charset="-122"/>
+                <a:cs typeface="Verdana" pitchFamily="34" charset="-120"/>
+              </a:rPr>
+              <a:t>Worksheet with 10 rows, each a list of 6–8 digits (printable)</a:t>
+            </a:r>
+            <a:endParaRPr lang="en-US" sz="1200" dirty="0"/>
+          </a:p>
+          <a:p>
+            <a:pPr algn="l" marL="342900" indent="-342900">
+              <a:lnSpc>
+                <a:spcPts val="1620"/>
+              </a:lnSpc>
+              <a:spcAft>
+                <a:spcPts val="300"/>
+              </a:spcAft>
+              <a:buSzPct val="100000"/>
+              <a:buChar char="•"/>
+            </a:pPr>
+            <a:r>
+              <a:rPr lang="en-US" sz="1200" dirty="0">
+                <a:solidFill>
+                  <a:srgbClr val="2C2C2C"/>
+                </a:solidFill>
+                <a:latin typeface="Verdana" pitchFamily="34" charset="0"/>
+                <a:ea typeface="Verdana" pitchFamily="34" charset="-122"/>
+                <a:cs typeface="Verdana" pitchFamily="34" charset="-120"/>
+              </a:rPr>
+              <a:t>Pencils</a:t>
+            </a:r>
+            <a:endParaRPr lang="en-US" sz="1200" dirty="0"/>
+          </a:p>
+        </p:txBody>
+      </p:sp>
+      <p:sp>
+        <p:nvSpPr>
+          <p:cNvPr id="5" name="Text 3"/>
           <p:cNvSpPr/>
           <p:nvPr/>
         </p:nvSpPr>
@@ -3043,7 +3332,7 @@
                 <a:ea typeface="Georgia" pitchFamily="34" charset="-122"/>
                 <a:cs typeface="Georgia" pitchFamily="34" charset="-120"/>
               </a:rPr>
-              <a:t>Settle + chant (5 min)</a:t>
+              <a:t>The flow</a:t>
             </a:r>
             <a:endParaRPr lang="en-US" sz="1800" dirty="0"/>
           </a:p>
@@ -3052,54 +3341,6 @@
       <p:sp>
         <p:nvSpPr>
           <p:cNvPr id="4" name="Text 2"/>
-          <p:cNvSpPr/>
-          <p:nvPr/>
-        </p:nvSpPr>
-        <p:spPr>
-          <a:xfrm>
-            <a:off x="406301" y="870942"/>
-            <a:ext cx="8498026" cy="213271"/>
-          </a:xfrm>
-          <a:prstGeom prst="rect">
-            <a:avLst/>
-          </a:prstGeom>
-          <a:noFill/>
-          <a:ln/>
-        </p:spPr>
-        <p:txBody>
-          <a:bodyPr wrap="square" lIns="0" tIns="0" rIns="0" bIns="0" rtlCol="0" anchor="t"/>
-          <a:lstStyle/>
-          <a:p>
-            <a:pPr algn="l" indent="0" marL="0">
-              <a:lnSpc>
-                <a:spcPts val="1680"/>
-              </a:lnSpc>
-              <a:spcBef>
-                <a:spcPts val="300"/>
-              </a:spcBef>
-              <a:spcAft>
-                <a:spcPts val="300"/>
-              </a:spcAft>
-              <a:buNone/>
-            </a:pPr>
-            <a:r>
-              <a:rPr lang="en-US" sz="1200" dirty="0">
-                <a:solidFill>
-                  <a:srgbClr val="2C2C2C"/>
-                </a:solidFill>
-                <a:latin typeface="Verdana" pitchFamily="34" charset="0"/>
-                <a:ea typeface="Verdana" pitchFamily="34" charset="-122"/>
-                <a:cs typeface="Verdana" pitchFamily="34" charset="-120"/>
-              </a:rPr>
-              <a:t>Daily chant.</a:t>
-            </a:r>
-            <a:endParaRPr lang="en-US" sz="1200" dirty="0"/>
-          </a:p>
-        </p:txBody>
-      </p:sp>
-      <p:sp>
-        <p:nvSpPr>
-          <p:cNvPr id="5" name="Text 3"/>
           <p:cNvSpPr/>
           <p:nvPr/>
         </p:nvSpPr>
@@ -3249,7 +3490,7 @@
                 <a:ea typeface="Georgia" pitchFamily="34" charset="-122"/>
                 <a:cs typeface="Georgia" pitchFamily="34" charset="-120"/>
               </a:rPr>
-              <a:t>Demonstration (5 min)</a:t>
+              <a:t>Settle + chant (5 min)</a:t>
             </a:r>
             <a:endParaRPr lang="en-US" sz="1800" dirty="0"/>
           </a:p>
@@ -3297,7 +3538,7 @@
                 <a:ea typeface="Verdana" pitchFamily="34" charset="-122"/>
                 <a:cs typeface="Verdana" pitchFamily="34" charset="-120"/>
               </a:rPr>
-              <a:t>– Teacher writes on the board:</a:t>
+              <a:t>Daily chant.</a:t>
             </a:r>
             <a:endParaRPr lang="en-US" sz="1200" dirty="0"/>
           </a:p>
@@ -3306,195 +3547,6 @@
       <p:sp>
         <p:nvSpPr>
           <p:cNvPr id="5" name="Text 3"/>
-          <p:cNvSpPr/>
-          <p:nvPr/>
-        </p:nvSpPr>
-        <p:spPr>
-          <a:xfrm>
-            <a:off x="406301" y="1173063"/>
-            <a:ext cx="8331398" cy="428476"/>
-          </a:xfrm>
-          <a:prstGeom prst="rect">
-            <a:avLst/>
-          </a:prstGeom>
-          <a:solidFill>
-            <a:srgbClr val="FFFFFF"/>
-          </a:solidFill>
-          <a:ln/>
-        </p:spPr>
-        <p:txBody>
-          <a:bodyPr wrap="square" rtlCol="0" anchor="ctr"/>
-          <a:lstStyle/>
-          <a:p>
-            <a:pPr indent="0" marL="0">
-              <a:buNone/>
-            </a:pPr>
-            <a:endParaRPr lang="en-US" dirty="0"/>
-          </a:p>
-        </p:txBody>
-      </p:sp>
-      <p:sp>
-        <p:nvSpPr>
-          <p:cNvPr id="6" name="Shape 4"/>
-          <p:cNvSpPr/>
-          <p:nvPr/>
-        </p:nvSpPr>
-        <p:spPr>
-          <a:xfrm>
-            <a:off x="430113" y="1173063"/>
-            <a:ext cx="0" cy="428476"/>
-          </a:xfrm>
-          <a:prstGeom prst="line">
-            <a:avLst/>
-          </a:prstGeom>
-          <a:noFill/>
-          <a:ln w="47625">
-            <a:solidFill>
-              <a:srgbClr val="87A96B"/>
-            </a:solidFill>
-            <a:prstDash val="solid"/>
-          </a:ln>
-        </p:spPr>
-      </p:sp>
-      <p:sp>
-        <p:nvSpPr>
-          <p:cNvPr id="7" name="Text 5"/>
-          <p:cNvSpPr/>
-          <p:nvPr/>
-        </p:nvSpPr>
-        <p:spPr>
-          <a:xfrm>
-            <a:off x="631627" y="1300014"/>
-            <a:ext cx="8086939" cy="174575"/>
-          </a:xfrm>
-          <a:prstGeom prst="rect">
-            <a:avLst/>
-          </a:prstGeom>
-          <a:noFill/>
-          <a:ln/>
-        </p:spPr>
-        <p:txBody>
-          <a:bodyPr wrap="square" lIns="0" tIns="0" rIns="0" bIns="0" rtlCol="0" anchor="t"/>
-          <a:lstStyle/>
-          <a:p>
-            <a:pPr algn="l" indent="0" marL="0">
-              <a:lnSpc>
-                <a:spcPts val="1375"/>
-              </a:lnSpc>
-              <a:buNone/>
-            </a:pPr>
-            <a:r>
-              <a:rPr lang="en-US" sz="1100" dirty="0">
-                <a:solidFill>
-                  <a:srgbClr val="2C2C2C"/>
-                </a:solidFill>
-                <a:latin typeface="Courier New" pitchFamily="34" charset="0"/>
-                <a:ea typeface="Courier New" pitchFamily="34" charset="-122"/>
-                <a:cs typeface="Courier New" pitchFamily="34" charset="-120"/>
-              </a:rPr>
-              <a:t>3  7  2  5  8  1  4  6</a:t>
-            </a:r>
-            <a:endParaRPr lang="en-US" sz="1100" dirty="0"/>
-          </a:p>
-        </p:txBody>
-      </p:sp>
-      <p:sp>
-        <p:nvSpPr>
-          <p:cNvPr id="8" name="Text 6"/>
-          <p:cNvSpPr/>
-          <p:nvPr/>
-        </p:nvSpPr>
-        <p:spPr>
-          <a:xfrm>
-            <a:off x="634901" y="1703040"/>
-            <a:ext cx="8102798" cy="281880"/>
-          </a:xfrm>
-          <a:prstGeom prst="rect">
-            <a:avLst/>
-          </a:prstGeom>
-          <a:noFill/>
-          <a:ln/>
-        </p:spPr>
-        <p:txBody>
-          <a:bodyPr wrap="square" lIns="0" tIns="0" rIns="0" bIns="0" rtlCol="0" anchor="t"/>
-          <a:lstStyle/>
-          <a:p>
-            <a:pPr algn="l" marL="342900" indent="-342900">
-              <a:lnSpc>
-                <a:spcPts val="1620"/>
-              </a:lnSpc>
-              <a:spcAft>
-                <a:spcPts val="300"/>
-              </a:spcAft>
-              <a:buSzPct val="100000"/>
-              <a:buChar char="•"/>
-            </a:pPr>
-            <a:r>
-              <a:rPr lang="en-US" sz="1200" i="1" dirty="0">
-                <a:solidFill>
-                  <a:srgbClr val="2C2C2C"/>
-                </a:solidFill>
-                <a:latin typeface="Verdana" pitchFamily="34" charset="0"/>
-                <a:ea typeface="Verdana" pitchFamily="34" charset="-122"/>
-                <a:cs typeface="Verdana" pitchFamily="34" charset="-120"/>
-              </a:rPr>
-              <a:t>"Find ALL the pairs that make 10. Circle them."</a:t>
-            </a:r>
-            <a:endParaRPr lang="en-US" sz="1200" dirty="0"/>
-          </a:p>
-        </p:txBody>
-      </p:sp>
-      <p:sp>
-        <p:nvSpPr>
-          <p:cNvPr id="9" name="Text 7"/>
-          <p:cNvSpPr/>
-          <p:nvPr/>
-        </p:nvSpPr>
-        <p:spPr>
-          <a:xfrm>
-            <a:off x="406301" y="2073771"/>
-            <a:ext cx="8498026" cy="213271"/>
-          </a:xfrm>
-          <a:prstGeom prst="rect">
-            <a:avLst/>
-          </a:prstGeom>
-          <a:noFill/>
-          <a:ln/>
-        </p:spPr>
-        <p:txBody>
-          <a:bodyPr wrap="square" lIns="0" tIns="0" rIns="0" bIns="0" rtlCol="0" anchor="t"/>
-          <a:lstStyle/>
-          <a:p>
-            <a:pPr algn="l" indent="0" marL="0">
-              <a:lnSpc>
-                <a:spcPts val="1680"/>
-              </a:lnSpc>
-              <a:spcBef>
-                <a:spcPts val="300"/>
-              </a:spcBef>
-              <a:spcAft>
-                <a:spcPts val="300"/>
-              </a:spcAft>
-              <a:buNone/>
-            </a:pPr>
-            <a:r>
-              <a:rPr lang="en-US" sz="1200" dirty="0">
-                <a:solidFill>
-                  <a:srgbClr val="2C2C2C"/>
-                </a:solidFill>
-                <a:latin typeface="Verdana" pitchFamily="34" charset="0"/>
-                <a:ea typeface="Verdana" pitchFamily="34" charset="-122"/>
-                <a:cs typeface="Verdana" pitchFamily="34" charset="-120"/>
-              </a:rPr>
-              <a:t>– Walk through together: 3+7, 2+8, 4+6. Three pairs. Leftover: 5, 1.</a:t>
-            </a:r>
-            <a:endParaRPr lang="en-US" sz="1200" dirty="0"/>
-          </a:p>
-        </p:txBody>
-      </p:sp>
-      <p:sp>
-        <p:nvSpPr>
-          <p:cNvPr id="10" name="Text 8"/>
           <p:cNvSpPr/>
           <p:nvPr/>
         </p:nvSpPr>
@@ -3644,7 +3696,7 @@
                 <a:ea typeface="Georgia" pitchFamily="34" charset="-122"/>
                 <a:cs typeface="Georgia" pitchFamily="34" charset="-120"/>
               </a:rPr>
-              <a:t>Scanning drill (20 min)</a:t>
+              <a:t>Demonstration (5 min)</a:t>
             </a:r>
             <a:endParaRPr lang="en-US" sz="1800" dirty="0"/>
           </a:p>
@@ -3658,8 +3710,8 @@
         </p:nvSpPr>
         <p:spPr>
           <a:xfrm>
-            <a:off x="406301" y="870942"/>
-            <a:ext cx="8498026" cy="426541"/>
+            <a:off x="634901" y="883593"/>
+            <a:ext cx="8102798" cy="281880"/>
           </a:xfrm>
           <a:prstGeom prst="rect">
             <a:avLst/>
@@ -3671,17 +3723,15 @@
           <a:bodyPr wrap="square" lIns="0" tIns="0" rIns="0" bIns="0" rtlCol="0" anchor="t"/>
           <a:lstStyle/>
           <a:p>
-            <a:pPr algn="l" indent="0" marL="0">
-              <a:lnSpc>
-                <a:spcPts val="1680"/>
-              </a:lnSpc>
-              <a:spcBef>
-                <a:spcPts val="300"/>
-              </a:spcBef>
+            <a:pPr algn="l" marL="342900" indent="-342900">
+              <a:lnSpc>
+                <a:spcPts val="1620"/>
+              </a:lnSpc>
               <a:spcAft>
                 <a:spcPts val="300"/>
               </a:spcAft>
-              <a:buNone/>
+              <a:buSzPct val="100000"/>
+              <a:buChar char="•"/>
             </a:pPr>
             <a:r>
               <a:rPr lang="en-US" sz="1200" dirty="0">
@@ -3692,7 +3742,7 @@
                 <a:ea typeface="Verdana" pitchFamily="34" charset="-122"/>
                 <a:cs typeface="Verdana" pitchFamily="34" charset="-120"/>
               </a:rPr>
-              <a:t>– Hand out worksheet. – Individual work: circle every 10-pair in each row. Note the leftover digits. – 10 rows. About 1 minute per row.</a:t>
+              <a:t>Teacher writes on the board:</a:t>
             </a:r>
             <a:endParaRPr lang="en-US" sz="1200" dirty="0"/>
           </a:p>
@@ -3706,13 +3756,66 @@
         </p:nvSpPr>
         <p:spPr>
           <a:xfrm>
-            <a:off x="406301" y="1373684"/>
-            <a:ext cx="8498026" cy="213271"/>
-          </a:xfrm>
-          <a:prstGeom prst="rect">
+            <a:off x="406301" y="1266974"/>
+            <a:ext cx="8331398" cy="428476"/>
+          </a:xfrm>
+          <a:prstGeom prst="rect">
+            <a:avLst/>
+          </a:prstGeom>
+          <a:solidFill>
+            <a:srgbClr val="FFFFFF"/>
+          </a:solidFill>
+          <a:ln/>
+        </p:spPr>
+        <p:txBody>
+          <a:bodyPr wrap="square" rtlCol="0" anchor="ctr"/>
+          <a:lstStyle/>
+          <a:p>
+            <a:pPr indent="0" marL="0">
+              <a:buNone/>
+            </a:pPr>
+            <a:endParaRPr lang="en-US" dirty="0"/>
+          </a:p>
+        </p:txBody>
+      </p:sp>
+      <p:sp>
+        <p:nvSpPr>
+          <p:cNvPr id="6" name="Shape 4"/>
+          <p:cNvSpPr/>
+          <p:nvPr/>
+        </p:nvSpPr>
+        <p:spPr>
+          <a:xfrm>
+            <a:off x="430113" y="1266974"/>
+            <a:ext cx="0" cy="428476"/>
+          </a:xfrm>
+          <a:prstGeom prst="line">
             <a:avLst/>
           </a:prstGeom>
           <a:noFill/>
+          <a:ln w="47625">
+            <a:solidFill>
+              <a:srgbClr val="87A96B"/>
+            </a:solidFill>
+            <a:prstDash val="solid"/>
+          </a:ln>
+        </p:spPr>
+      </p:sp>
+      <p:sp>
+        <p:nvSpPr>
+          <p:cNvPr id="7" name="Text 5"/>
+          <p:cNvSpPr/>
+          <p:nvPr/>
+        </p:nvSpPr>
+        <p:spPr>
+          <a:xfrm>
+            <a:off x="631627" y="1393924"/>
+            <a:ext cx="8086939" cy="174575"/>
+          </a:xfrm>
+          <a:prstGeom prst="rect">
+            <a:avLst/>
+          </a:prstGeom>
+          <a:noFill/>
           <a:ln/>
         </p:spPr>
         <p:txBody>
@@ -3721,18 +3824,58 @@
           <a:p>
             <a:pPr algn="l" indent="0" marL="0">
               <a:lnSpc>
-                <a:spcPts val="1680"/>
-              </a:lnSpc>
-              <a:spcBef>
-                <a:spcPts val="300"/>
-              </a:spcBef>
+                <a:spcPts val="1375"/>
+              </a:lnSpc>
+              <a:buNone/>
+            </a:pPr>
+            <a:r>
+              <a:rPr lang="en-US" sz="1100" dirty="0">
+                <a:solidFill>
+                  <a:srgbClr val="2C2C2C"/>
+                </a:solidFill>
+                <a:latin typeface="Courier New" pitchFamily="34" charset="0"/>
+                <a:ea typeface="Courier New" pitchFamily="34" charset="-122"/>
+                <a:cs typeface="Courier New" pitchFamily="34" charset="-120"/>
+              </a:rPr>
+              <a:t>3  7  2  5  8  1  4  6</a:t>
+            </a:r>
+            <a:endParaRPr lang="en-US" sz="1100" dirty="0"/>
+          </a:p>
+        </p:txBody>
+      </p:sp>
+      <p:sp>
+        <p:nvSpPr>
+          <p:cNvPr id="8" name="Text 6"/>
+          <p:cNvSpPr/>
+          <p:nvPr/>
+        </p:nvSpPr>
+        <p:spPr>
+          <a:xfrm>
+            <a:off x="634901" y="1796951"/>
+            <a:ext cx="8102798" cy="525661"/>
+          </a:xfrm>
+          <a:prstGeom prst="rect">
+            <a:avLst/>
+          </a:prstGeom>
+          <a:noFill/>
+          <a:ln/>
+        </p:spPr>
+        <p:txBody>
+          <a:bodyPr wrap="square" lIns="0" tIns="0" rIns="0" bIns="0" rtlCol="0" anchor="t"/>
+          <a:lstStyle/>
+          <a:p>
+            <a:pPr algn="l" marL="342900" indent="-342900">
+              <a:lnSpc>
+                <a:spcPts val="1620"/>
+              </a:lnSpc>
               <a:spcAft>
                 <a:spcPts val="300"/>
               </a:spcAft>
-              <a:buNone/>
-            </a:pPr>
-            <a:r>
-              <a:rPr lang="en-US" sz="1200" dirty="0">
+              <a:buSzPct val="100000"/>
+              <a:buChar char="•"/>
+            </a:pPr>
+            <a:r>
+              <a:rPr lang="en-US" sz="1200" i="1" dirty="0">
                 <a:solidFill>
                   <a:srgbClr val="2C2C2C"/>
                 </a:solidFill>
@@ -3740,22 +3883,23 @@
                 <a:ea typeface="Verdana" pitchFamily="34" charset="-122"/>
                 <a:cs typeface="Verdana" pitchFamily="34" charset="-120"/>
               </a:rPr>
-              <a:t>After 10 min, </a:t>
-            </a:r>
-            <a:pPr algn="l" indent="0" marL="0">
-              <a:lnSpc>
-                <a:spcPts val="1680"/>
-              </a:lnSpc>
-              <a:spcBef>
-                <a:spcPts val="300"/>
-              </a:spcBef>
+              <a:t>"Find ALL the pairs that make 10. Circle them."</a:t>
+            </a:r>
+            <a:endParaRPr lang="en-US" sz="1200" dirty="0"/>
+          </a:p>
+          <a:p>
+            <a:pPr algn="l" marL="342900" indent="-342900">
+              <a:lnSpc>
+                <a:spcPts val="1620"/>
+              </a:lnSpc>
               <a:spcAft>
                 <a:spcPts val="300"/>
               </a:spcAft>
-              <a:buNone/>
-            </a:pPr>
-            <a:r>
-              <a:rPr lang="en-US" sz="1200" b="1" dirty="0">
+              <a:buSzPct val="100000"/>
+              <a:buChar char="•"/>
+            </a:pPr>
+            <a:r>
+              <a:rPr lang="en-US" sz="1200" dirty="0">
                 <a:solidFill>
                   <a:srgbClr val="2C2C2C"/>
                 </a:solidFill>
@@ -3763,30 +3907,7 @@
                 <a:ea typeface="Verdana" pitchFamily="34" charset="-122"/>
                 <a:cs typeface="Verdana" pitchFamily="34" charset="-120"/>
               </a:rPr>
-              <a:t>paired check</a:t>
-            </a:r>
-            <a:pPr algn="l" indent="0" marL="0">
-              <a:lnSpc>
-                <a:spcPts val="1680"/>
-              </a:lnSpc>
-              <a:spcBef>
-                <a:spcPts val="300"/>
-              </a:spcBef>
-              <a:spcAft>
-                <a:spcPts val="300"/>
-              </a:spcAft>
-              <a:buNone/>
-            </a:pPr>
-            <a:r>
-              <a:rPr lang="en-US" sz="1200" dirty="0">
-                <a:solidFill>
-                  <a:srgbClr val="2C2C2C"/>
-                </a:solidFill>
-                <a:latin typeface="Verdana" pitchFamily="34" charset="0"/>
-                <a:ea typeface="Verdana" pitchFamily="34" charset="-122"/>
-                <a:cs typeface="Verdana" pitchFamily="34" charset="-120"/>
-              </a:rPr>
-              <a:t>: partner reads a row aloud; you find pairs in under 10 seconds.</a:t>
+              <a:t>Walk through together: 3+7, 2+8, 4+6. Three pairs. Leftover: 5, 1.</a:t>
             </a:r>
             <a:endParaRPr lang="en-US" sz="1200" dirty="0"/>
           </a:p>
@@ -3794,7 +3915,7 @@
       </p:sp>
       <p:sp>
         <p:nvSpPr>
-          <p:cNvPr id="6" name="Text 4"/>
+          <p:cNvPr id="9" name="Text 7"/>
           <p:cNvSpPr/>
           <p:nvPr/>
         </p:nvSpPr>
@@ -3944,7 +4065,7 @@
                 <a:ea typeface="Georgia" pitchFamily="34" charset="-122"/>
                 <a:cs typeface="Georgia" pitchFamily="34" charset="-120"/>
               </a:rPr>
-              <a:t>Speed round (5 min)</a:t>
+              <a:t>Scanning drill (20 min)</a:t>
             </a:r>
             <a:endParaRPr lang="en-US" sz="1800" dirty="0"/>
           </a:p>
@@ -3958,8 +4079,8 @@
         </p:nvSpPr>
         <p:spPr>
           <a:xfrm>
-            <a:off x="406301" y="870942"/>
-            <a:ext cx="8498026" cy="213271"/>
+            <a:off x="634901" y="883593"/>
+            <a:ext cx="8102798" cy="769441"/>
           </a:xfrm>
           <a:prstGeom prst="rect">
             <a:avLst/>
@@ -3971,17 +4092,15 @@
           <a:bodyPr wrap="square" lIns="0" tIns="0" rIns="0" bIns="0" rtlCol="0" anchor="t"/>
           <a:lstStyle/>
           <a:p>
-            <a:pPr algn="l" indent="0" marL="0">
-              <a:lnSpc>
-                <a:spcPts val="1680"/>
-              </a:lnSpc>
-              <a:spcBef>
-                <a:spcPts val="300"/>
-              </a:spcBef>
+            <a:pPr algn="l" marL="342900" indent="-342900">
+              <a:lnSpc>
+                <a:spcPts val="1620"/>
+              </a:lnSpc>
               <a:spcAft>
                 <a:spcPts val="300"/>
               </a:spcAft>
-              <a:buNone/>
+              <a:buSzPct val="100000"/>
+              <a:buChar char="•"/>
             </a:pPr>
             <a:r>
               <a:rPr lang="en-US" sz="1200" dirty="0">
@@ -3992,223 +4111,20 @@
                 <a:ea typeface="Verdana" pitchFamily="34" charset="-122"/>
                 <a:cs typeface="Verdana" pitchFamily="34" charset="-120"/>
               </a:rPr>
-              <a:t>Teacher projects one row at a time on the board:</a:t>
+              <a:t>Hand out worksheet.</a:t>
             </a:r>
             <a:endParaRPr lang="en-US" sz="1200" dirty="0"/>
           </a:p>
-        </p:txBody>
-      </p:sp>
-      <p:sp>
-        <p:nvSpPr>
-          <p:cNvPr id="5" name="Text 3"/>
-          <p:cNvSpPr/>
-          <p:nvPr/>
-        </p:nvSpPr>
-        <p:spPr>
-          <a:xfrm>
-            <a:off x="406301" y="1173063"/>
-            <a:ext cx="8331398" cy="777627"/>
-          </a:xfrm>
-          <a:prstGeom prst="rect">
-            <a:avLst/>
-          </a:prstGeom>
-          <a:solidFill>
-            <a:srgbClr val="FFFFFF"/>
-          </a:solidFill>
-          <a:ln/>
-        </p:spPr>
-        <p:txBody>
-          <a:bodyPr wrap="square" rtlCol="0" anchor="ctr"/>
-          <a:lstStyle/>
-          <a:p>
-            <a:pPr indent="0" marL="0">
-              <a:buNone/>
-            </a:pPr>
-            <a:endParaRPr lang="en-US" dirty="0"/>
-          </a:p>
-        </p:txBody>
-      </p:sp>
-      <p:sp>
-        <p:nvSpPr>
-          <p:cNvPr id="6" name="Shape 4"/>
-          <p:cNvSpPr/>
-          <p:nvPr/>
-        </p:nvSpPr>
-        <p:spPr>
-          <a:xfrm>
-            <a:off x="430113" y="1173063"/>
-            <a:ext cx="0" cy="777627"/>
-          </a:xfrm>
-          <a:prstGeom prst="line">
-            <a:avLst/>
-          </a:prstGeom>
-          <a:noFill/>
-          <a:ln w="47625">
-            <a:solidFill>
-              <a:srgbClr val="87A96B"/>
-            </a:solidFill>
-            <a:prstDash val="solid"/>
-          </a:ln>
-        </p:spPr>
-      </p:sp>
-      <p:sp>
-        <p:nvSpPr>
-          <p:cNvPr id="7" name="Text 5"/>
-          <p:cNvSpPr/>
-          <p:nvPr/>
-        </p:nvSpPr>
-        <p:spPr>
-          <a:xfrm>
-            <a:off x="631627" y="1300014"/>
-            <a:ext cx="8086939" cy="174575"/>
-          </a:xfrm>
-          <a:prstGeom prst="rect">
-            <a:avLst/>
-          </a:prstGeom>
-          <a:noFill/>
-          <a:ln/>
-        </p:spPr>
-        <p:txBody>
-          <a:bodyPr wrap="square" lIns="0" tIns="0" rIns="0" bIns="0" rtlCol="0" anchor="t"/>
-          <a:lstStyle/>
-          <a:p>
-            <a:pPr algn="l" indent="0" marL="0">
-              <a:lnSpc>
-                <a:spcPts val="1375"/>
-              </a:lnSpc>
-              <a:buNone/>
-            </a:pPr>
-            <a:r>
-              <a:rPr lang="en-US" sz="1100" dirty="0">
-                <a:solidFill>
-                  <a:srgbClr val="2C2C2C"/>
-                </a:solidFill>
-                <a:latin typeface="Courier New" pitchFamily="34" charset="0"/>
-                <a:ea typeface="Courier New" pitchFamily="34" charset="-122"/>
-                <a:cs typeface="Courier New" pitchFamily="34" charset="-120"/>
-              </a:rPr>
-              <a:t>4 6 2 8 3 7</a:t>
-            </a:r>
-            <a:endParaRPr lang="en-US" sz="1100" dirty="0"/>
-          </a:p>
-        </p:txBody>
-      </p:sp>
-      <p:sp>
-        <p:nvSpPr>
-          <p:cNvPr id="8" name="Text 6"/>
-          <p:cNvSpPr/>
-          <p:nvPr/>
-        </p:nvSpPr>
-        <p:spPr>
-          <a:xfrm>
-            <a:off x="631627" y="1474589"/>
-            <a:ext cx="8086939" cy="174575"/>
-          </a:xfrm>
-          <a:prstGeom prst="rect">
-            <a:avLst/>
-          </a:prstGeom>
-          <a:noFill/>
-          <a:ln/>
-        </p:spPr>
-        <p:txBody>
-          <a:bodyPr wrap="square" lIns="0" tIns="0" rIns="0" bIns="0" rtlCol="0" anchor="t"/>
-          <a:lstStyle/>
-          <a:p>
-            <a:pPr algn="l" indent="0" marL="0">
-              <a:lnSpc>
-                <a:spcPts val="1375"/>
-              </a:lnSpc>
-              <a:buNone/>
-            </a:pPr>
-            <a:r>
-              <a:rPr lang="en-US" sz="1100" dirty="0">
-                <a:solidFill>
-                  <a:srgbClr val="2C2C2C"/>
-                </a:solidFill>
-                <a:latin typeface="Courier New" pitchFamily="34" charset="0"/>
-                <a:ea typeface="Courier New" pitchFamily="34" charset="-122"/>
-                <a:cs typeface="Courier New" pitchFamily="34" charset="-120"/>
-              </a:rPr>
-              <a:t>1 9 5 5 3 7</a:t>
-            </a:r>
-            <a:endParaRPr lang="en-US" sz="1100" dirty="0"/>
-          </a:p>
-        </p:txBody>
-      </p:sp>
-      <p:sp>
-        <p:nvSpPr>
-          <p:cNvPr id="9" name="Text 7"/>
-          <p:cNvSpPr/>
-          <p:nvPr/>
-        </p:nvSpPr>
-        <p:spPr>
-          <a:xfrm>
-            <a:off x="631627" y="1649164"/>
-            <a:ext cx="8086939" cy="174575"/>
-          </a:xfrm>
-          <a:prstGeom prst="rect">
-            <a:avLst/>
-          </a:prstGeom>
-          <a:noFill/>
-          <a:ln/>
-        </p:spPr>
-        <p:txBody>
-          <a:bodyPr wrap="square" lIns="0" tIns="0" rIns="0" bIns="0" rtlCol="0" anchor="t"/>
-          <a:lstStyle/>
-          <a:p>
-            <a:pPr algn="l" indent="0" marL="0">
-              <a:lnSpc>
-                <a:spcPts val="1375"/>
-              </a:lnSpc>
-              <a:buNone/>
-            </a:pPr>
-            <a:r>
-              <a:rPr lang="en-US" sz="1100" dirty="0">
-                <a:solidFill>
-                  <a:srgbClr val="2C2C2C"/>
-                </a:solidFill>
-                <a:latin typeface="Courier New" pitchFamily="34" charset="0"/>
-                <a:ea typeface="Courier New" pitchFamily="34" charset="-122"/>
-                <a:cs typeface="Courier New" pitchFamily="34" charset="-120"/>
-              </a:rPr>
-              <a:t>8 2 6 4 7 3</a:t>
-            </a:r>
-            <a:endParaRPr lang="en-US" sz="1100" dirty="0"/>
-          </a:p>
-        </p:txBody>
-      </p:sp>
-      <p:sp>
-        <p:nvSpPr>
-          <p:cNvPr id="10" name="Text 8"/>
-          <p:cNvSpPr/>
-          <p:nvPr/>
-        </p:nvSpPr>
-        <p:spPr>
-          <a:xfrm>
-            <a:off x="406301" y="2039541"/>
-            <a:ext cx="8498026" cy="213271"/>
-          </a:xfrm>
-          <a:prstGeom prst="rect">
-            <a:avLst/>
-          </a:prstGeom>
-          <a:noFill/>
-          <a:ln/>
-        </p:spPr>
-        <p:txBody>
-          <a:bodyPr wrap="square" lIns="0" tIns="0" rIns="0" bIns="0" rtlCol="0" anchor="t"/>
-          <a:lstStyle/>
-          <a:p>
-            <a:pPr algn="l" indent="0" marL="0">
-              <a:lnSpc>
-                <a:spcPts val="1680"/>
-              </a:lnSpc>
-              <a:spcBef>
-                <a:spcPts val="300"/>
-              </a:spcBef>
+          <a:p>
+            <a:pPr algn="l" marL="342900" indent="-342900">
+              <a:lnSpc>
+                <a:spcPts val="1620"/>
+              </a:lnSpc>
               <a:spcAft>
                 <a:spcPts val="300"/>
               </a:spcAft>
-              <a:buNone/>
+              <a:buSzPct val="100000"/>
+              <a:buChar char="•"/>
             </a:pPr>
             <a:r>
               <a:rPr lang="en-US" sz="1200" dirty="0">
@@ -4219,15 +4135,133 @@
                 <a:ea typeface="Verdana" pitchFamily="34" charset="-122"/>
                 <a:cs typeface="Verdana" pitchFamily="34" charset="-120"/>
               </a:rPr>
-              <a:t>Class shouts pairs in chorus. 20 seconds per row.</a:t>
+              <a:t>Individual work: circle every 10-pair in each row. Note the leftover digits.</a:t>
             </a:r>
             <a:endParaRPr lang="en-US" sz="1200" dirty="0"/>
           </a:p>
-        </p:txBody>
-      </p:sp>
-      <p:sp>
-        <p:nvSpPr>
-          <p:cNvPr id="11" name="Text 9"/>
+          <a:p>
+            <a:pPr algn="l" marL="342900" indent="-342900">
+              <a:lnSpc>
+                <a:spcPts val="1620"/>
+              </a:lnSpc>
+              <a:spcAft>
+                <a:spcPts val="300"/>
+              </a:spcAft>
+              <a:buSzPct val="100000"/>
+              <a:buChar char="•"/>
+            </a:pPr>
+            <a:r>
+              <a:rPr lang="en-US" sz="1200" dirty="0">
+                <a:solidFill>
+                  <a:srgbClr val="2C2C2C"/>
+                </a:solidFill>
+                <a:latin typeface="Verdana" pitchFamily="34" charset="0"/>
+                <a:ea typeface="Verdana" pitchFamily="34" charset="-122"/>
+                <a:cs typeface="Verdana" pitchFamily="34" charset="-120"/>
+              </a:rPr>
+              <a:t>10 rows. About 1 minute per row.</a:t>
+            </a:r>
+            <a:endParaRPr lang="en-US" sz="1200" dirty="0"/>
+          </a:p>
+        </p:txBody>
+      </p:sp>
+      <p:sp>
+        <p:nvSpPr>
+          <p:cNvPr id="5" name="Text 3"/>
+          <p:cNvSpPr/>
+          <p:nvPr/>
+        </p:nvSpPr>
+        <p:spPr>
+          <a:xfrm>
+            <a:off x="406301" y="1741884"/>
+            <a:ext cx="8498026" cy="213271"/>
+          </a:xfrm>
+          <a:prstGeom prst="rect">
+            <a:avLst/>
+          </a:prstGeom>
+          <a:noFill/>
+          <a:ln/>
+        </p:spPr>
+        <p:txBody>
+          <a:bodyPr wrap="square" lIns="0" tIns="0" rIns="0" bIns="0" rtlCol="0" anchor="t"/>
+          <a:lstStyle/>
+          <a:p>
+            <a:pPr algn="l" indent="0" marL="0">
+              <a:lnSpc>
+                <a:spcPts val="1680"/>
+              </a:lnSpc>
+              <a:spcBef>
+                <a:spcPts val="300"/>
+              </a:spcBef>
+              <a:spcAft>
+                <a:spcPts val="300"/>
+              </a:spcAft>
+              <a:buNone/>
+            </a:pPr>
+            <a:r>
+              <a:rPr lang="en-US" sz="1200" dirty="0">
+                <a:solidFill>
+                  <a:srgbClr val="2C2C2C"/>
+                </a:solidFill>
+                <a:latin typeface="Verdana" pitchFamily="34" charset="0"/>
+                <a:ea typeface="Verdana" pitchFamily="34" charset="-122"/>
+                <a:cs typeface="Verdana" pitchFamily="34" charset="-120"/>
+              </a:rPr>
+              <a:t>After 10 min, </a:t>
+            </a:r>
+            <a:pPr algn="l" indent="0" marL="0">
+              <a:lnSpc>
+                <a:spcPts val="1680"/>
+              </a:lnSpc>
+              <a:spcBef>
+                <a:spcPts val="300"/>
+              </a:spcBef>
+              <a:spcAft>
+                <a:spcPts val="300"/>
+              </a:spcAft>
+              <a:buNone/>
+            </a:pPr>
+            <a:r>
+              <a:rPr lang="en-US" sz="1200" b="1" dirty="0">
+                <a:solidFill>
+                  <a:srgbClr val="2C2C2C"/>
+                </a:solidFill>
+                <a:latin typeface="Verdana" pitchFamily="34" charset="0"/>
+                <a:ea typeface="Verdana" pitchFamily="34" charset="-122"/>
+                <a:cs typeface="Verdana" pitchFamily="34" charset="-120"/>
+              </a:rPr>
+              <a:t>paired check</a:t>
+            </a:r>
+            <a:pPr algn="l" indent="0" marL="0">
+              <a:lnSpc>
+                <a:spcPts val="1680"/>
+              </a:lnSpc>
+              <a:spcBef>
+                <a:spcPts val="300"/>
+              </a:spcBef>
+              <a:spcAft>
+                <a:spcPts val="300"/>
+              </a:spcAft>
+              <a:buNone/>
+            </a:pPr>
+            <a:r>
+              <a:rPr lang="en-US" sz="1200" dirty="0">
+                <a:solidFill>
+                  <a:srgbClr val="2C2C2C"/>
+                </a:solidFill>
+                <a:latin typeface="Verdana" pitchFamily="34" charset="0"/>
+                <a:ea typeface="Verdana" pitchFamily="34" charset="-122"/>
+                <a:cs typeface="Verdana" pitchFamily="34" charset="-120"/>
+              </a:rPr>
+              <a:t>: partner reads a row aloud; you find pairs in under 10 seconds.</a:t>
+            </a:r>
+            <a:endParaRPr lang="en-US" sz="1200" dirty="0"/>
+          </a:p>
+        </p:txBody>
+      </p:sp>
+      <p:sp>
+        <p:nvSpPr>
+          <p:cNvPr id="6" name="Text 4"/>
           <p:cNvSpPr/>
           <p:nvPr/>
         </p:nvSpPr>
@@ -4377,7 +4411,7 @@
                 <a:ea typeface="Georgia" pitchFamily="34" charset="-122"/>
                 <a:cs typeface="Georgia" pitchFamily="34" charset="-120"/>
               </a:rPr>
-              <a:t>Show + chant (close)</a:t>
+              <a:t>Speed round (5 min)</a:t>
             </a:r>
             <a:endParaRPr lang="en-US" sz="1800" dirty="0"/>
           </a:p>
@@ -4425,7 +4459,7 @@
                 <a:ea typeface="Verdana" pitchFamily="34" charset="-122"/>
                 <a:cs typeface="Verdana" pitchFamily="34" charset="-120"/>
               </a:rPr>
-              <a:t>Daily chant.</a:t>
+              <a:t>Teacher projects one row at a time on the board:</a:t>
             </a:r>
             <a:endParaRPr lang="en-US" sz="1200" dirty="0"/>
           </a:p>
@@ -4434,6 +4468,233 @@
       <p:sp>
         <p:nvSpPr>
           <p:cNvPr id="5" name="Text 3"/>
+          <p:cNvSpPr/>
+          <p:nvPr/>
+        </p:nvSpPr>
+        <p:spPr>
+          <a:xfrm>
+            <a:off x="406301" y="1173063"/>
+            <a:ext cx="8331398" cy="777627"/>
+          </a:xfrm>
+          <a:prstGeom prst="rect">
+            <a:avLst/>
+          </a:prstGeom>
+          <a:solidFill>
+            <a:srgbClr val="FFFFFF"/>
+          </a:solidFill>
+          <a:ln/>
+        </p:spPr>
+        <p:txBody>
+          <a:bodyPr wrap="square" rtlCol="0" anchor="ctr"/>
+          <a:lstStyle/>
+          <a:p>
+            <a:pPr indent="0" marL="0">
+              <a:buNone/>
+            </a:pPr>
+            <a:endParaRPr lang="en-US" dirty="0"/>
+          </a:p>
+        </p:txBody>
+      </p:sp>
+      <p:sp>
+        <p:nvSpPr>
+          <p:cNvPr id="6" name="Shape 4"/>
+          <p:cNvSpPr/>
+          <p:nvPr/>
+        </p:nvSpPr>
+        <p:spPr>
+          <a:xfrm>
+            <a:off x="430113" y="1173063"/>
+            <a:ext cx="0" cy="777627"/>
+          </a:xfrm>
+          <a:prstGeom prst="line">
+            <a:avLst/>
+          </a:prstGeom>
+          <a:noFill/>
+          <a:ln w="47625">
+            <a:solidFill>
+              <a:srgbClr val="87A96B"/>
+            </a:solidFill>
+            <a:prstDash val="solid"/>
+          </a:ln>
+        </p:spPr>
+      </p:sp>
+      <p:sp>
+        <p:nvSpPr>
+          <p:cNvPr id="7" name="Text 5"/>
+          <p:cNvSpPr/>
+          <p:nvPr/>
+        </p:nvSpPr>
+        <p:spPr>
+          <a:xfrm>
+            <a:off x="631627" y="1300014"/>
+            <a:ext cx="8086939" cy="174575"/>
+          </a:xfrm>
+          <a:prstGeom prst="rect">
+            <a:avLst/>
+          </a:prstGeom>
+          <a:noFill/>
+          <a:ln/>
+        </p:spPr>
+        <p:txBody>
+          <a:bodyPr wrap="square" lIns="0" tIns="0" rIns="0" bIns="0" rtlCol="0" anchor="t"/>
+          <a:lstStyle/>
+          <a:p>
+            <a:pPr algn="l" indent="0" marL="0">
+              <a:lnSpc>
+                <a:spcPts val="1375"/>
+              </a:lnSpc>
+              <a:buNone/>
+            </a:pPr>
+            <a:r>
+              <a:rPr lang="en-US" sz="1100" dirty="0">
+                <a:solidFill>
+                  <a:srgbClr val="2C2C2C"/>
+                </a:solidFill>
+                <a:latin typeface="Courier New" pitchFamily="34" charset="0"/>
+                <a:ea typeface="Courier New" pitchFamily="34" charset="-122"/>
+                <a:cs typeface="Courier New" pitchFamily="34" charset="-120"/>
+              </a:rPr>
+              <a:t>4 6 2 8 3 7</a:t>
+            </a:r>
+            <a:endParaRPr lang="en-US" sz="1100" dirty="0"/>
+          </a:p>
+        </p:txBody>
+      </p:sp>
+      <p:sp>
+        <p:nvSpPr>
+          <p:cNvPr id="8" name="Text 6"/>
+          <p:cNvSpPr/>
+          <p:nvPr/>
+        </p:nvSpPr>
+        <p:spPr>
+          <a:xfrm>
+            <a:off x="631627" y="1474589"/>
+            <a:ext cx="8086939" cy="174575"/>
+          </a:xfrm>
+          <a:prstGeom prst="rect">
+            <a:avLst/>
+          </a:prstGeom>
+          <a:noFill/>
+          <a:ln/>
+        </p:spPr>
+        <p:txBody>
+          <a:bodyPr wrap="square" lIns="0" tIns="0" rIns="0" bIns="0" rtlCol="0" anchor="t"/>
+          <a:lstStyle/>
+          <a:p>
+            <a:pPr algn="l" indent="0" marL="0">
+              <a:lnSpc>
+                <a:spcPts val="1375"/>
+              </a:lnSpc>
+              <a:buNone/>
+            </a:pPr>
+            <a:r>
+              <a:rPr lang="en-US" sz="1100" dirty="0">
+                <a:solidFill>
+                  <a:srgbClr val="2C2C2C"/>
+                </a:solidFill>
+                <a:latin typeface="Courier New" pitchFamily="34" charset="0"/>
+                <a:ea typeface="Courier New" pitchFamily="34" charset="-122"/>
+                <a:cs typeface="Courier New" pitchFamily="34" charset="-120"/>
+              </a:rPr>
+              <a:t>1 9 5 5 3 7</a:t>
+            </a:r>
+            <a:endParaRPr lang="en-US" sz="1100" dirty="0"/>
+          </a:p>
+        </p:txBody>
+      </p:sp>
+      <p:sp>
+        <p:nvSpPr>
+          <p:cNvPr id="9" name="Text 7"/>
+          <p:cNvSpPr/>
+          <p:nvPr/>
+        </p:nvSpPr>
+        <p:spPr>
+          <a:xfrm>
+            <a:off x="631627" y="1649164"/>
+            <a:ext cx="8086939" cy="174575"/>
+          </a:xfrm>
+          <a:prstGeom prst="rect">
+            <a:avLst/>
+          </a:prstGeom>
+          <a:noFill/>
+          <a:ln/>
+        </p:spPr>
+        <p:txBody>
+          <a:bodyPr wrap="square" lIns="0" tIns="0" rIns="0" bIns="0" rtlCol="0" anchor="t"/>
+          <a:lstStyle/>
+          <a:p>
+            <a:pPr algn="l" indent="0" marL="0">
+              <a:lnSpc>
+                <a:spcPts val="1375"/>
+              </a:lnSpc>
+              <a:buNone/>
+            </a:pPr>
+            <a:r>
+              <a:rPr lang="en-US" sz="1100" dirty="0">
+                <a:solidFill>
+                  <a:srgbClr val="2C2C2C"/>
+                </a:solidFill>
+                <a:latin typeface="Courier New" pitchFamily="34" charset="0"/>
+                <a:ea typeface="Courier New" pitchFamily="34" charset="-122"/>
+                <a:cs typeface="Courier New" pitchFamily="34" charset="-120"/>
+              </a:rPr>
+              <a:t>8 2 6 4 7 3</a:t>
+            </a:r>
+            <a:endParaRPr lang="en-US" sz="1100" dirty="0"/>
+          </a:p>
+        </p:txBody>
+      </p:sp>
+      <p:sp>
+        <p:nvSpPr>
+          <p:cNvPr id="10" name="Text 8"/>
+          <p:cNvSpPr/>
+          <p:nvPr/>
+        </p:nvSpPr>
+        <p:spPr>
+          <a:xfrm>
+            <a:off x="406301" y="2039541"/>
+            <a:ext cx="8498026" cy="213271"/>
+          </a:xfrm>
+          <a:prstGeom prst="rect">
+            <a:avLst/>
+          </a:prstGeom>
+          <a:noFill/>
+          <a:ln/>
+        </p:spPr>
+        <p:txBody>
+          <a:bodyPr wrap="square" lIns="0" tIns="0" rIns="0" bIns="0" rtlCol="0" anchor="t"/>
+          <a:lstStyle/>
+          <a:p>
+            <a:pPr algn="l" indent="0" marL="0">
+              <a:lnSpc>
+                <a:spcPts val="1680"/>
+              </a:lnSpc>
+              <a:spcBef>
+                <a:spcPts val="300"/>
+              </a:spcBef>
+              <a:spcAft>
+                <a:spcPts val="300"/>
+              </a:spcAft>
+              <a:buNone/>
+            </a:pPr>
+            <a:r>
+              <a:rPr lang="en-US" sz="1200" dirty="0">
+                <a:solidFill>
+                  <a:srgbClr val="2C2C2C"/>
+                </a:solidFill>
+                <a:latin typeface="Verdana" pitchFamily="34" charset="0"/>
+                <a:ea typeface="Verdana" pitchFamily="34" charset="-122"/>
+                <a:cs typeface="Verdana" pitchFamily="34" charset="-120"/>
+              </a:rPr>
+              <a:t>Class shouts pairs in chorus. 20 seconds per row.</a:t>
+            </a:r>
+            <a:endParaRPr lang="en-US" sz="1200" dirty="0"/>
+          </a:p>
+        </p:txBody>
+      </p:sp>
+      <p:sp>
+        <p:nvSpPr>
+          <p:cNvPr id="11" name="Text 9"/>
           <p:cNvSpPr/>
           <p:nvPr/>
         </p:nvSpPr>
@@ -4583,7 +4844,7 @@
                 <a:ea typeface="Georgia" pitchFamily="34" charset="-122"/>
                 <a:cs typeface="Georgia" pitchFamily="34" charset="-120"/>
               </a:rPr>
-              <a:t>Homework</a:t>
+              <a:t>Show + chant (close)</a:t>
             </a:r>
             <a:endParaRPr lang="en-US" sz="1800" dirty="0"/>
           </a:p>
@@ -4631,7 +4892,7 @@
                 <a:ea typeface="Verdana" pitchFamily="34" charset="-122"/>
                 <a:cs typeface="Verdana" pitchFamily="34" charset="-120"/>
               </a:rPr>
-              <a:t>– 5 more scanning rows on the back of the worksheet.</a:t>
+              <a:t>Daily chant.</a:t>
             </a:r>
             <a:endParaRPr lang="en-US" sz="1200" dirty="0"/>
           </a:p>
